--- a/public/videos/repositories/hobby-stock-price-alert/hobby-stock-price-alert-tech-preview.pptx
+++ b/public/videos/repositories/hobby-stock-price-alert/hobby-stock-price-alert-tech-preview.pptx
@@ -134,7 +134,7 @@
           <p:cNvPr id="2" name="タイトル 1">
             <a:extLst>
               <a:ext uri="{FF2B5EF4-FFF2-40B4-BE49-F238E27FC236}">
-                <a16:creationId xmlns:a16="http://schemas.microsoft.com/office/drawing/2014/main" id="{906DB69B-1908-2179-9E6E-EAAF324BBC6E}"/>
+                <a16:creationId xmlns:a16="http://schemas.microsoft.com/office/drawing/2014/main" id="{99B271E0-74C5-A8BB-4305-D4E96E6FE418}"/>
               </a:ext>
             </a:extLst>
           </p:cNvPr>
@@ -171,7 +171,7 @@
           <p:cNvPr id="3" name="字幕 2">
             <a:extLst>
               <a:ext uri="{FF2B5EF4-FFF2-40B4-BE49-F238E27FC236}">
-                <a16:creationId xmlns:a16="http://schemas.microsoft.com/office/drawing/2014/main" id="{0CE7B56F-D7DF-4BC4-5D29-6324C51A5E0B}"/>
+                <a16:creationId xmlns:a16="http://schemas.microsoft.com/office/drawing/2014/main" id="{E5ABABF2-73C0-6D78-8C98-BB2168F2EE21}"/>
               </a:ext>
             </a:extLst>
           </p:cNvPr>
@@ -241,7 +241,7 @@
           <p:cNvPr id="4" name="日付プレースホルダー 3">
             <a:extLst>
               <a:ext uri="{FF2B5EF4-FFF2-40B4-BE49-F238E27FC236}">
-                <a16:creationId xmlns:a16="http://schemas.microsoft.com/office/drawing/2014/main" id="{6F063B37-05CC-DBBC-696B-A9DF4CE07474}"/>
+                <a16:creationId xmlns:a16="http://schemas.microsoft.com/office/drawing/2014/main" id="{DC3D6608-1537-9263-4126-AE2B9008C642}"/>
               </a:ext>
             </a:extLst>
           </p:cNvPr>
@@ -257,7 +257,7 @@
           <a:bodyPr/>
           <a:lstStyle/>
           <a:p>
-            <a:fld id="{2F9DD6D7-D718-4B09-B399-2A4D4643B2E6}" type="datetimeFigureOut">
+            <a:fld id="{9FF39823-9F7C-4473-B22B-C0B3B985F780}" type="datetimeFigureOut">
               <a:rPr kumimoji="1" lang="ja-JP" altLang="en-US" smtClean="0"/>
               <a:t>2026/7/30</a:t>
             </a:fld>
@@ -270,7 +270,7 @@
           <p:cNvPr id="5" name="フッター プレースホルダー 4">
             <a:extLst>
               <a:ext uri="{FF2B5EF4-FFF2-40B4-BE49-F238E27FC236}">
-                <a16:creationId xmlns:a16="http://schemas.microsoft.com/office/drawing/2014/main" id="{96950764-2BAE-5A37-86C0-BB69C11EB0B5}"/>
+                <a16:creationId xmlns:a16="http://schemas.microsoft.com/office/drawing/2014/main" id="{98553509-6D81-6798-6548-E3F8B8386F10}"/>
               </a:ext>
             </a:extLst>
           </p:cNvPr>
@@ -295,7 +295,7 @@
           <p:cNvPr id="6" name="スライド番号プレースホルダー 5">
             <a:extLst>
               <a:ext uri="{FF2B5EF4-FFF2-40B4-BE49-F238E27FC236}">
-                <a16:creationId xmlns:a16="http://schemas.microsoft.com/office/drawing/2014/main" id="{55EC4B06-5E96-639E-43B5-BF9141E4C3AC}"/>
+                <a16:creationId xmlns:a16="http://schemas.microsoft.com/office/drawing/2014/main" id="{7D394C2D-EDB2-3AB6-45B8-2F981C685F9F}"/>
               </a:ext>
             </a:extLst>
           </p:cNvPr>
@@ -311,7 +311,7 @@
           <a:bodyPr/>
           <a:lstStyle/>
           <a:p>
-            <a:fld id="{38BDA9F7-CA3A-475F-9FB9-344FD4873BBF}" type="slidenum">
+            <a:fld id="{CAD3AFF4-7F8C-4E27-95AB-1697E9F409A7}" type="slidenum">
               <a:rPr kumimoji="1" lang="ja-JP" altLang="en-US" smtClean="0"/>
               <a:t>‹#›</a:t>
             </a:fld>
@@ -322,7 +322,7 @@
     </p:spTree>
     <p:extLst>
       <p:ext uri="{BB962C8B-B14F-4D97-AF65-F5344CB8AC3E}">
-        <p14:creationId xmlns:p14="http://schemas.microsoft.com/office/powerpoint/2010/main" val="1298743134"/>
+        <p14:creationId xmlns:p14="http://schemas.microsoft.com/office/powerpoint/2010/main" val="1801622643"/>
       </p:ext>
     </p:extLst>
   </p:cSld>
@@ -354,7 +354,7 @@
           <p:cNvPr id="2" name="タイトル 1">
             <a:extLst>
               <a:ext uri="{FF2B5EF4-FFF2-40B4-BE49-F238E27FC236}">
-                <a16:creationId xmlns:a16="http://schemas.microsoft.com/office/drawing/2014/main" id="{1ED850AF-6C97-C155-EA3E-ED7CED675D59}"/>
+                <a16:creationId xmlns:a16="http://schemas.microsoft.com/office/drawing/2014/main" id="{B3F0732B-4AA2-B57E-667B-E0AD0C25238B}"/>
               </a:ext>
             </a:extLst>
           </p:cNvPr>
@@ -382,7 +382,7 @@
           <p:cNvPr id="3" name="縦書きテキスト プレースホルダー 2">
             <a:extLst>
               <a:ext uri="{FF2B5EF4-FFF2-40B4-BE49-F238E27FC236}">
-                <a16:creationId xmlns:a16="http://schemas.microsoft.com/office/drawing/2014/main" id="{374D6E86-67FC-2D37-BAAD-898336167A80}"/>
+                <a16:creationId xmlns:a16="http://schemas.microsoft.com/office/drawing/2014/main" id="{F13CD143-C1E9-8F83-25BB-FD26E4693C28}"/>
               </a:ext>
             </a:extLst>
           </p:cNvPr>
@@ -471,7 +471,7 @@
           <p:cNvPr id="4" name="日付プレースホルダー 3">
             <a:extLst>
               <a:ext uri="{FF2B5EF4-FFF2-40B4-BE49-F238E27FC236}">
-                <a16:creationId xmlns:a16="http://schemas.microsoft.com/office/drawing/2014/main" id="{BFDBF740-6FC2-1431-87B2-F3CCB412C188}"/>
+                <a16:creationId xmlns:a16="http://schemas.microsoft.com/office/drawing/2014/main" id="{A7FF75C5-766C-67AA-AF56-4BBFB8822226}"/>
               </a:ext>
             </a:extLst>
           </p:cNvPr>
@@ -487,7 +487,7 @@
           <a:bodyPr/>
           <a:lstStyle/>
           <a:p>
-            <a:fld id="{2F9DD6D7-D718-4B09-B399-2A4D4643B2E6}" type="datetimeFigureOut">
+            <a:fld id="{9FF39823-9F7C-4473-B22B-C0B3B985F780}" type="datetimeFigureOut">
               <a:rPr kumimoji="1" lang="ja-JP" altLang="en-US" smtClean="0"/>
               <a:t>2026/7/30</a:t>
             </a:fld>
@@ -500,7 +500,7 @@
           <p:cNvPr id="5" name="フッター プレースホルダー 4">
             <a:extLst>
               <a:ext uri="{FF2B5EF4-FFF2-40B4-BE49-F238E27FC236}">
-                <a16:creationId xmlns:a16="http://schemas.microsoft.com/office/drawing/2014/main" id="{D25FE2D8-2D12-38F0-E7F3-94C40F6D9773}"/>
+                <a16:creationId xmlns:a16="http://schemas.microsoft.com/office/drawing/2014/main" id="{053F5973-0B29-8F7E-344C-DFB63AA674E0}"/>
               </a:ext>
             </a:extLst>
           </p:cNvPr>
@@ -525,7 +525,7 @@
           <p:cNvPr id="6" name="スライド番号プレースホルダー 5">
             <a:extLst>
               <a:ext uri="{FF2B5EF4-FFF2-40B4-BE49-F238E27FC236}">
-                <a16:creationId xmlns:a16="http://schemas.microsoft.com/office/drawing/2014/main" id="{5D80C3AE-D4DA-658B-56D1-A3959DA65305}"/>
+                <a16:creationId xmlns:a16="http://schemas.microsoft.com/office/drawing/2014/main" id="{5312D5BD-9CF8-73A4-4D5A-932B4E8001E7}"/>
               </a:ext>
             </a:extLst>
           </p:cNvPr>
@@ -541,7 +541,7 @@
           <a:bodyPr/>
           <a:lstStyle/>
           <a:p>
-            <a:fld id="{38BDA9F7-CA3A-475F-9FB9-344FD4873BBF}" type="slidenum">
+            <a:fld id="{CAD3AFF4-7F8C-4E27-95AB-1697E9F409A7}" type="slidenum">
               <a:rPr kumimoji="1" lang="ja-JP" altLang="en-US" smtClean="0"/>
               <a:t>‹#›</a:t>
             </a:fld>
@@ -552,7 +552,7 @@
     </p:spTree>
     <p:extLst>
       <p:ext uri="{BB962C8B-B14F-4D97-AF65-F5344CB8AC3E}">
-        <p14:creationId xmlns:p14="http://schemas.microsoft.com/office/powerpoint/2010/main" val="1179383055"/>
+        <p14:creationId xmlns:p14="http://schemas.microsoft.com/office/powerpoint/2010/main" val="2828305124"/>
       </p:ext>
     </p:extLst>
   </p:cSld>
@@ -584,7 +584,7 @@
           <p:cNvPr id="2" name="縦書きタイトル 1">
             <a:extLst>
               <a:ext uri="{FF2B5EF4-FFF2-40B4-BE49-F238E27FC236}">
-                <a16:creationId xmlns:a16="http://schemas.microsoft.com/office/drawing/2014/main" id="{388C0201-0C1A-DE1F-61D4-4EA19B13C38A}"/>
+                <a16:creationId xmlns:a16="http://schemas.microsoft.com/office/drawing/2014/main" id="{98AD01EE-6D75-D8EE-4261-5978010D8D4D}"/>
               </a:ext>
             </a:extLst>
           </p:cNvPr>
@@ -617,7 +617,7 @@
           <p:cNvPr id="3" name="縦書きテキスト プレースホルダー 2">
             <a:extLst>
               <a:ext uri="{FF2B5EF4-FFF2-40B4-BE49-F238E27FC236}">
-                <a16:creationId xmlns:a16="http://schemas.microsoft.com/office/drawing/2014/main" id="{0627A282-A51B-DB1B-CA42-8D226E1AC98E}"/>
+                <a16:creationId xmlns:a16="http://schemas.microsoft.com/office/drawing/2014/main" id="{313E8C78-6ED0-AAEC-8620-16258CD34558}"/>
               </a:ext>
             </a:extLst>
           </p:cNvPr>
@@ -711,7 +711,7 @@
           <p:cNvPr id="4" name="日付プレースホルダー 3">
             <a:extLst>
               <a:ext uri="{FF2B5EF4-FFF2-40B4-BE49-F238E27FC236}">
-                <a16:creationId xmlns:a16="http://schemas.microsoft.com/office/drawing/2014/main" id="{8FC24241-0F7D-6EB9-416E-CD9793BD2762}"/>
+                <a16:creationId xmlns:a16="http://schemas.microsoft.com/office/drawing/2014/main" id="{0CCE2306-936C-7D19-06DC-A900CE12289C}"/>
               </a:ext>
             </a:extLst>
           </p:cNvPr>
@@ -727,7 +727,7 @@
           <a:bodyPr/>
           <a:lstStyle/>
           <a:p>
-            <a:fld id="{2F9DD6D7-D718-4B09-B399-2A4D4643B2E6}" type="datetimeFigureOut">
+            <a:fld id="{9FF39823-9F7C-4473-B22B-C0B3B985F780}" type="datetimeFigureOut">
               <a:rPr kumimoji="1" lang="ja-JP" altLang="en-US" smtClean="0"/>
               <a:t>2026/7/30</a:t>
             </a:fld>
@@ -740,7 +740,7 @@
           <p:cNvPr id="5" name="フッター プレースホルダー 4">
             <a:extLst>
               <a:ext uri="{FF2B5EF4-FFF2-40B4-BE49-F238E27FC236}">
-                <a16:creationId xmlns:a16="http://schemas.microsoft.com/office/drawing/2014/main" id="{258E58B4-564B-5CC7-8F2A-336D941C7057}"/>
+                <a16:creationId xmlns:a16="http://schemas.microsoft.com/office/drawing/2014/main" id="{948B9CD4-AC2D-FF2E-E5FF-692EC1367555}"/>
               </a:ext>
             </a:extLst>
           </p:cNvPr>
@@ -765,7 +765,7 @@
           <p:cNvPr id="6" name="スライド番号プレースホルダー 5">
             <a:extLst>
               <a:ext uri="{FF2B5EF4-FFF2-40B4-BE49-F238E27FC236}">
-                <a16:creationId xmlns:a16="http://schemas.microsoft.com/office/drawing/2014/main" id="{800D33E3-234B-CCF3-5143-315BBFCD4279}"/>
+                <a16:creationId xmlns:a16="http://schemas.microsoft.com/office/drawing/2014/main" id="{9F5A2C57-41BA-D004-370A-2B029A774550}"/>
               </a:ext>
             </a:extLst>
           </p:cNvPr>
@@ -781,7 +781,7 @@
           <a:bodyPr/>
           <a:lstStyle/>
           <a:p>
-            <a:fld id="{38BDA9F7-CA3A-475F-9FB9-344FD4873BBF}" type="slidenum">
+            <a:fld id="{CAD3AFF4-7F8C-4E27-95AB-1697E9F409A7}" type="slidenum">
               <a:rPr kumimoji="1" lang="ja-JP" altLang="en-US" smtClean="0"/>
               <a:t>‹#›</a:t>
             </a:fld>
@@ -792,7 +792,7 @@
     </p:spTree>
     <p:extLst>
       <p:ext uri="{BB962C8B-B14F-4D97-AF65-F5344CB8AC3E}">
-        <p14:creationId xmlns:p14="http://schemas.microsoft.com/office/powerpoint/2010/main" val="260678817"/>
+        <p14:creationId xmlns:p14="http://schemas.microsoft.com/office/powerpoint/2010/main" val="2964553949"/>
       </p:ext>
     </p:extLst>
   </p:cSld>
@@ -824,7 +824,7 @@
           <p:cNvPr id="2" name="タイトル 1">
             <a:extLst>
               <a:ext uri="{FF2B5EF4-FFF2-40B4-BE49-F238E27FC236}">
-                <a16:creationId xmlns:a16="http://schemas.microsoft.com/office/drawing/2014/main" id="{B2FEF7C5-119C-A1F9-89B9-4F6510EDC914}"/>
+                <a16:creationId xmlns:a16="http://schemas.microsoft.com/office/drawing/2014/main" id="{5187EEDA-C01B-21D6-D48D-FBBC90595E1C}"/>
               </a:ext>
             </a:extLst>
           </p:cNvPr>
@@ -852,7 +852,7 @@
           <p:cNvPr id="3" name="コンテンツ プレースホルダー 2">
             <a:extLst>
               <a:ext uri="{FF2B5EF4-FFF2-40B4-BE49-F238E27FC236}">
-                <a16:creationId xmlns:a16="http://schemas.microsoft.com/office/drawing/2014/main" id="{289B7A0A-BB9A-CDBD-E85D-DD50666E1B55}"/>
+                <a16:creationId xmlns:a16="http://schemas.microsoft.com/office/drawing/2014/main" id="{DE849638-5C9A-B599-98D1-A0F8EFAD1DB8}"/>
               </a:ext>
             </a:extLst>
           </p:cNvPr>
@@ -941,7 +941,7 @@
           <p:cNvPr id="4" name="日付プレースホルダー 3">
             <a:extLst>
               <a:ext uri="{FF2B5EF4-FFF2-40B4-BE49-F238E27FC236}">
-                <a16:creationId xmlns:a16="http://schemas.microsoft.com/office/drawing/2014/main" id="{D688CE25-E823-2E95-6961-389228D9E020}"/>
+                <a16:creationId xmlns:a16="http://schemas.microsoft.com/office/drawing/2014/main" id="{59053EDC-AAA2-FBA7-E145-B239519374E0}"/>
               </a:ext>
             </a:extLst>
           </p:cNvPr>
@@ -957,7 +957,7 @@
           <a:bodyPr/>
           <a:lstStyle/>
           <a:p>
-            <a:fld id="{2F9DD6D7-D718-4B09-B399-2A4D4643B2E6}" type="datetimeFigureOut">
+            <a:fld id="{9FF39823-9F7C-4473-B22B-C0B3B985F780}" type="datetimeFigureOut">
               <a:rPr kumimoji="1" lang="ja-JP" altLang="en-US" smtClean="0"/>
               <a:t>2026/7/30</a:t>
             </a:fld>
@@ -970,7 +970,7 @@
           <p:cNvPr id="5" name="フッター プレースホルダー 4">
             <a:extLst>
               <a:ext uri="{FF2B5EF4-FFF2-40B4-BE49-F238E27FC236}">
-                <a16:creationId xmlns:a16="http://schemas.microsoft.com/office/drawing/2014/main" id="{57CB194D-C8D9-D328-FA3D-5612A11D8ED5}"/>
+                <a16:creationId xmlns:a16="http://schemas.microsoft.com/office/drawing/2014/main" id="{F9561EEF-6773-9B10-A29F-FBBE9F7A192D}"/>
               </a:ext>
             </a:extLst>
           </p:cNvPr>
@@ -995,7 +995,7 @@
           <p:cNvPr id="6" name="スライド番号プレースホルダー 5">
             <a:extLst>
               <a:ext uri="{FF2B5EF4-FFF2-40B4-BE49-F238E27FC236}">
-                <a16:creationId xmlns:a16="http://schemas.microsoft.com/office/drawing/2014/main" id="{EA9FA6A8-1BC3-4129-C225-3B0BD942EDF6}"/>
+                <a16:creationId xmlns:a16="http://schemas.microsoft.com/office/drawing/2014/main" id="{00FBBF43-618B-FB93-5A99-BA663DABB9A7}"/>
               </a:ext>
             </a:extLst>
           </p:cNvPr>
@@ -1011,7 +1011,7 @@
           <a:bodyPr/>
           <a:lstStyle/>
           <a:p>
-            <a:fld id="{38BDA9F7-CA3A-475F-9FB9-344FD4873BBF}" type="slidenum">
+            <a:fld id="{CAD3AFF4-7F8C-4E27-95AB-1697E9F409A7}" type="slidenum">
               <a:rPr kumimoji="1" lang="ja-JP" altLang="en-US" smtClean="0"/>
               <a:t>‹#›</a:t>
             </a:fld>
@@ -1022,7 +1022,7 @@
     </p:spTree>
     <p:extLst>
       <p:ext uri="{BB962C8B-B14F-4D97-AF65-F5344CB8AC3E}">
-        <p14:creationId xmlns:p14="http://schemas.microsoft.com/office/powerpoint/2010/main" val="4067662087"/>
+        <p14:creationId xmlns:p14="http://schemas.microsoft.com/office/powerpoint/2010/main" val="3768612097"/>
       </p:ext>
     </p:extLst>
   </p:cSld>
@@ -1054,7 +1054,7 @@
           <p:cNvPr id="2" name="タイトル 1">
             <a:extLst>
               <a:ext uri="{FF2B5EF4-FFF2-40B4-BE49-F238E27FC236}">
-                <a16:creationId xmlns:a16="http://schemas.microsoft.com/office/drawing/2014/main" id="{09591C70-4261-D837-2736-F06B14CCDE21}"/>
+                <a16:creationId xmlns:a16="http://schemas.microsoft.com/office/drawing/2014/main" id="{4A1133A5-0C65-ACE9-59AA-B8C494DA1805}"/>
               </a:ext>
             </a:extLst>
           </p:cNvPr>
@@ -1091,7 +1091,7 @@
           <p:cNvPr id="3" name="テキスト プレースホルダー 2">
             <a:extLst>
               <a:ext uri="{FF2B5EF4-FFF2-40B4-BE49-F238E27FC236}">
-                <a16:creationId xmlns:a16="http://schemas.microsoft.com/office/drawing/2014/main" id="{B7D05BB2-58D7-2550-4383-77A8893348F6}"/>
+                <a16:creationId xmlns:a16="http://schemas.microsoft.com/office/drawing/2014/main" id="{876B5A43-D318-8FA6-7269-04D54936AB4A}"/>
               </a:ext>
             </a:extLst>
           </p:cNvPr>
@@ -1216,7 +1216,7 @@
           <p:cNvPr id="4" name="日付プレースホルダー 3">
             <a:extLst>
               <a:ext uri="{FF2B5EF4-FFF2-40B4-BE49-F238E27FC236}">
-                <a16:creationId xmlns:a16="http://schemas.microsoft.com/office/drawing/2014/main" id="{13A3E71F-F77B-50A4-7357-FFF8A2B09EDF}"/>
+                <a16:creationId xmlns:a16="http://schemas.microsoft.com/office/drawing/2014/main" id="{5D426789-F34D-8CD9-ABB7-A1719AE7CB84}"/>
               </a:ext>
             </a:extLst>
           </p:cNvPr>
@@ -1232,7 +1232,7 @@
           <a:bodyPr/>
           <a:lstStyle/>
           <a:p>
-            <a:fld id="{2F9DD6D7-D718-4B09-B399-2A4D4643B2E6}" type="datetimeFigureOut">
+            <a:fld id="{9FF39823-9F7C-4473-B22B-C0B3B985F780}" type="datetimeFigureOut">
               <a:rPr kumimoji="1" lang="ja-JP" altLang="en-US" smtClean="0"/>
               <a:t>2026/7/30</a:t>
             </a:fld>
@@ -1245,7 +1245,7 @@
           <p:cNvPr id="5" name="フッター プレースホルダー 4">
             <a:extLst>
               <a:ext uri="{FF2B5EF4-FFF2-40B4-BE49-F238E27FC236}">
-                <a16:creationId xmlns:a16="http://schemas.microsoft.com/office/drawing/2014/main" id="{D9A40EE9-FF51-94BB-A4F4-8DFA8F9C4A2A}"/>
+                <a16:creationId xmlns:a16="http://schemas.microsoft.com/office/drawing/2014/main" id="{1464618E-C731-8717-CB6A-5D4CA4463598}"/>
               </a:ext>
             </a:extLst>
           </p:cNvPr>
@@ -1270,7 +1270,7 @@
           <p:cNvPr id="6" name="スライド番号プレースホルダー 5">
             <a:extLst>
               <a:ext uri="{FF2B5EF4-FFF2-40B4-BE49-F238E27FC236}">
-                <a16:creationId xmlns:a16="http://schemas.microsoft.com/office/drawing/2014/main" id="{52437D8C-FFE2-3AAB-8379-64607A872C8F}"/>
+                <a16:creationId xmlns:a16="http://schemas.microsoft.com/office/drawing/2014/main" id="{8B36F01D-B33A-869A-3F3F-460702959302}"/>
               </a:ext>
             </a:extLst>
           </p:cNvPr>
@@ -1286,7 +1286,7 @@
           <a:bodyPr/>
           <a:lstStyle/>
           <a:p>
-            <a:fld id="{38BDA9F7-CA3A-475F-9FB9-344FD4873BBF}" type="slidenum">
+            <a:fld id="{CAD3AFF4-7F8C-4E27-95AB-1697E9F409A7}" type="slidenum">
               <a:rPr kumimoji="1" lang="ja-JP" altLang="en-US" smtClean="0"/>
               <a:t>‹#›</a:t>
             </a:fld>
@@ -1297,7 +1297,7 @@
     </p:spTree>
     <p:extLst>
       <p:ext uri="{BB962C8B-B14F-4D97-AF65-F5344CB8AC3E}">
-        <p14:creationId xmlns:p14="http://schemas.microsoft.com/office/powerpoint/2010/main" val="212879542"/>
+        <p14:creationId xmlns:p14="http://schemas.microsoft.com/office/powerpoint/2010/main" val="4089769072"/>
       </p:ext>
     </p:extLst>
   </p:cSld>
@@ -1329,7 +1329,7 @@
           <p:cNvPr id="2" name="タイトル 1">
             <a:extLst>
               <a:ext uri="{FF2B5EF4-FFF2-40B4-BE49-F238E27FC236}">
-                <a16:creationId xmlns:a16="http://schemas.microsoft.com/office/drawing/2014/main" id="{CA0B55B2-0389-B829-23D0-538BFFC1854E}"/>
+                <a16:creationId xmlns:a16="http://schemas.microsoft.com/office/drawing/2014/main" id="{1D9B9B1D-4167-E1D0-E3B9-B61FBA2F4B17}"/>
               </a:ext>
             </a:extLst>
           </p:cNvPr>
@@ -1357,7 +1357,7 @@
           <p:cNvPr id="3" name="コンテンツ プレースホルダー 2">
             <a:extLst>
               <a:ext uri="{FF2B5EF4-FFF2-40B4-BE49-F238E27FC236}">
-                <a16:creationId xmlns:a16="http://schemas.microsoft.com/office/drawing/2014/main" id="{6ABCFE81-79B9-2A1D-6924-3BEF7AE363B4}"/>
+                <a16:creationId xmlns:a16="http://schemas.microsoft.com/office/drawing/2014/main" id="{E159CF86-D7DC-EA36-A501-138F0AC0E7BA}"/>
               </a:ext>
             </a:extLst>
           </p:cNvPr>
@@ -1451,7 +1451,7 @@
           <p:cNvPr id="4" name="コンテンツ プレースホルダー 3">
             <a:extLst>
               <a:ext uri="{FF2B5EF4-FFF2-40B4-BE49-F238E27FC236}">
-                <a16:creationId xmlns:a16="http://schemas.microsoft.com/office/drawing/2014/main" id="{E551C268-0AED-3E50-5E36-A49337F4FEEE}"/>
+                <a16:creationId xmlns:a16="http://schemas.microsoft.com/office/drawing/2014/main" id="{5852C2B1-05A1-9621-BBE7-38E04E6AAFD2}"/>
               </a:ext>
             </a:extLst>
           </p:cNvPr>
@@ -1545,7 +1545,7 @@
           <p:cNvPr id="5" name="日付プレースホルダー 4">
             <a:extLst>
               <a:ext uri="{FF2B5EF4-FFF2-40B4-BE49-F238E27FC236}">
-                <a16:creationId xmlns:a16="http://schemas.microsoft.com/office/drawing/2014/main" id="{316A0817-67B3-19F4-3152-C570B9FCCED8}"/>
+                <a16:creationId xmlns:a16="http://schemas.microsoft.com/office/drawing/2014/main" id="{0DC51ED0-8722-46A6-9D6F-2A4857076A67}"/>
               </a:ext>
             </a:extLst>
           </p:cNvPr>
@@ -1561,7 +1561,7 @@
           <a:bodyPr/>
           <a:lstStyle/>
           <a:p>
-            <a:fld id="{2F9DD6D7-D718-4B09-B399-2A4D4643B2E6}" type="datetimeFigureOut">
+            <a:fld id="{9FF39823-9F7C-4473-B22B-C0B3B985F780}" type="datetimeFigureOut">
               <a:rPr kumimoji="1" lang="ja-JP" altLang="en-US" smtClean="0"/>
               <a:t>2026/7/30</a:t>
             </a:fld>
@@ -1574,7 +1574,7 @@
           <p:cNvPr id="6" name="フッター プレースホルダー 5">
             <a:extLst>
               <a:ext uri="{FF2B5EF4-FFF2-40B4-BE49-F238E27FC236}">
-                <a16:creationId xmlns:a16="http://schemas.microsoft.com/office/drawing/2014/main" id="{2FBFE45B-8AA3-C8E8-1D85-EB0E8BEC12DD}"/>
+                <a16:creationId xmlns:a16="http://schemas.microsoft.com/office/drawing/2014/main" id="{93694E44-9C50-E007-785D-4BA3ACA04571}"/>
               </a:ext>
             </a:extLst>
           </p:cNvPr>
@@ -1599,7 +1599,7 @@
           <p:cNvPr id="7" name="スライド番号プレースホルダー 6">
             <a:extLst>
               <a:ext uri="{FF2B5EF4-FFF2-40B4-BE49-F238E27FC236}">
-                <a16:creationId xmlns:a16="http://schemas.microsoft.com/office/drawing/2014/main" id="{CEE52D3D-1948-EE69-13C0-7066647E391F}"/>
+                <a16:creationId xmlns:a16="http://schemas.microsoft.com/office/drawing/2014/main" id="{88BE0E2D-BDCE-B3EA-2025-0D32E0BFE6DE}"/>
               </a:ext>
             </a:extLst>
           </p:cNvPr>
@@ -1615,7 +1615,7 @@
           <a:bodyPr/>
           <a:lstStyle/>
           <a:p>
-            <a:fld id="{38BDA9F7-CA3A-475F-9FB9-344FD4873BBF}" type="slidenum">
+            <a:fld id="{CAD3AFF4-7F8C-4E27-95AB-1697E9F409A7}" type="slidenum">
               <a:rPr kumimoji="1" lang="ja-JP" altLang="en-US" smtClean="0"/>
               <a:t>‹#›</a:t>
             </a:fld>
@@ -1626,7 +1626,7 @@
     </p:spTree>
     <p:extLst>
       <p:ext uri="{BB962C8B-B14F-4D97-AF65-F5344CB8AC3E}">
-        <p14:creationId xmlns:p14="http://schemas.microsoft.com/office/powerpoint/2010/main" val="1767517127"/>
+        <p14:creationId xmlns:p14="http://schemas.microsoft.com/office/powerpoint/2010/main" val="1488962327"/>
       </p:ext>
     </p:extLst>
   </p:cSld>
@@ -1658,7 +1658,7 @@
           <p:cNvPr id="2" name="タイトル 1">
             <a:extLst>
               <a:ext uri="{FF2B5EF4-FFF2-40B4-BE49-F238E27FC236}">
-                <a16:creationId xmlns:a16="http://schemas.microsoft.com/office/drawing/2014/main" id="{938A38BF-863F-71F3-FA0B-10E8277F7041}"/>
+                <a16:creationId xmlns:a16="http://schemas.microsoft.com/office/drawing/2014/main" id="{B4965FE8-1E7A-8E5A-FDF7-84FB7BE81D95}"/>
               </a:ext>
             </a:extLst>
           </p:cNvPr>
@@ -1691,7 +1691,7 @@
           <p:cNvPr id="3" name="テキスト プレースホルダー 2">
             <a:extLst>
               <a:ext uri="{FF2B5EF4-FFF2-40B4-BE49-F238E27FC236}">
-                <a16:creationId xmlns:a16="http://schemas.microsoft.com/office/drawing/2014/main" id="{89280CF7-7ACC-64FF-D246-5DB3D5213711}"/>
+                <a16:creationId xmlns:a16="http://schemas.microsoft.com/office/drawing/2014/main" id="{A981608F-4B08-7822-0A81-08CAC5CE3826}"/>
               </a:ext>
             </a:extLst>
           </p:cNvPr>
@@ -1762,7 +1762,7 @@
           <p:cNvPr id="4" name="コンテンツ プレースホルダー 3">
             <a:extLst>
               <a:ext uri="{FF2B5EF4-FFF2-40B4-BE49-F238E27FC236}">
-                <a16:creationId xmlns:a16="http://schemas.microsoft.com/office/drawing/2014/main" id="{5E0418DF-A19A-70B2-46E9-1438AF6C239C}"/>
+                <a16:creationId xmlns:a16="http://schemas.microsoft.com/office/drawing/2014/main" id="{52B9815B-AA3E-8B3E-7AE3-7FFEFCD2FC53}"/>
               </a:ext>
             </a:extLst>
           </p:cNvPr>
@@ -1856,7 +1856,7 @@
           <p:cNvPr id="5" name="テキスト プレースホルダー 4">
             <a:extLst>
               <a:ext uri="{FF2B5EF4-FFF2-40B4-BE49-F238E27FC236}">
-                <a16:creationId xmlns:a16="http://schemas.microsoft.com/office/drawing/2014/main" id="{3AF0C709-022F-B840-15F1-1D4B8EB1A510}"/>
+                <a16:creationId xmlns:a16="http://schemas.microsoft.com/office/drawing/2014/main" id="{5C92E327-2E12-B87E-8FD2-922971F3F31E}"/>
               </a:ext>
             </a:extLst>
           </p:cNvPr>
@@ -1927,7 +1927,7 @@
           <p:cNvPr id="6" name="コンテンツ プレースホルダー 5">
             <a:extLst>
               <a:ext uri="{FF2B5EF4-FFF2-40B4-BE49-F238E27FC236}">
-                <a16:creationId xmlns:a16="http://schemas.microsoft.com/office/drawing/2014/main" id="{B4FCFDE8-78C5-7B62-5BB9-A103F57692FE}"/>
+                <a16:creationId xmlns:a16="http://schemas.microsoft.com/office/drawing/2014/main" id="{D8E99F54-3618-A2AF-7D26-44B35814A101}"/>
               </a:ext>
             </a:extLst>
           </p:cNvPr>
@@ -2021,7 +2021,7 @@
           <p:cNvPr id="7" name="日付プレースホルダー 6">
             <a:extLst>
               <a:ext uri="{FF2B5EF4-FFF2-40B4-BE49-F238E27FC236}">
-                <a16:creationId xmlns:a16="http://schemas.microsoft.com/office/drawing/2014/main" id="{62541732-2AD1-2E79-7CAE-2D059EBDBDF1}"/>
+                <a16:creationId xmlns:a16="http://schemas.microsoft.com/office/drawing/2014/main" id="{92C0913D-6BD0-EE0E-E6C3-BEFE3F0FB61C}"/>
               </a:ext>
             </a:extLst>
           </p:cNvPr>
@@ -2037,7 +2037,7 @@
           <a:bodyPr/>
           <a:lstStyle/>
           <a:p>
-            <a:fld id="{2F9DD6D7-D718-4B09-B399-2A4D4643B2E6}" type="datetimeFigureOut">
+            <a:fld id="{9FF39823-9F7C-4473-B22B-C0B3B985F780}" type="datetimeFigureOut">
               <a:rPr kumimoji="1" lang="ja-JP" altLang="en-US" smtClean="0"/>
               <a:t>2026/7/30</a:t>
             </a:fld>
@@ -2050,7 +2050,7 @@
           <p:cNvPr id="8" name="フッター プレースホルダー 7">
             <a:extLst>
               <a:ext uri="{FF2B5EF4-FFF2-40B4-BE49-F238E27FC236}">
-                <a16:creationId xmlns:a16="http://schemas.microsoft.com/office/drawing/2014/main" id="{041F675D-2BEC-3C43-1F3A-D505C12EA7D3}"/>
+                <a16:creationId xmlns:a16="http://schemas.microsoft.com/office/drawing/2014/main" id="{528342EF-5AB8-CA7B-F39A-E168CC1EDDEC}"/>
               </a:ext>
             </a:extLst>
           </p:cNvPr>
@@ -2075,7 +2075,7 @@
           <p:cNvPr id="9" name="スライド番号プレースホルダー 8">
             <a:extLst>
               <a:ext uri="{FF2B5EF4-FFF2-40B4-BE49-F238E27FC236}">
-                <a16:creationId xmlns:a16="http://schemas.microsoft.com/office/drawing/2014/main" id="{B30B7EC5-B565-DD50-4177-F136856B055C}"/>
+                <a16:creationId xmlns:a16="http://schemas.microsoft.com/office/drawing/2014/main" id="{0825376B-34CC-3E2E-F85D-ACDC93F93A3F}"/>
               </a:ext>
             </a:extLst>
           </p:cNvPr>
@@ -2091,7 +2091,7 @@
           <a:bodyPr/>
           <a:lstStyle/>
           <a:p>
-            <a:fld id="{38BDA9F7-CA3A-475F-9FB9-344FD4873BBF}" type="slidenum">
+            <a:fld id="{CAD3AFF4-7F8C-4E27-95AB-1697E9F409A7}" type="slidenum">
               <a:rPr kumimoji="1" lang="ja-JP" altLang="en-US" smtClean="0"/>
               <a:t>‹#›</a:t>
             </a:fld>
@@ -2102,7 +2102,7 @@
     </p:spTree>
     <p:extLst>
       <p:ext uri="{BB962C8B-B14F-4D97-AF65-F5344CB8AC3E}">
-        <p14:creationId xmlns:p14="http://schemas.microsoft.com/office/powerpoint/2010/main" val="1773213350"/>
+        <p14:creationId xmlns:p14="http://schemas.microsoft.com/office/powerpoint/2010/main" val="1743955656"/>
       </p:ext>
     </p:extLst>
   </p:cSld>
@@ -2134,7 +2134,7 @@
           <p:cNvPr id="2" name="タイトル 1">
             <a:extLst>
               <a:ext uri="{FF2B5EF4-FFF2-40B4-BE49-F238E27FC236}">
-                <a16:creationId xmlns:a16="http://schemas.microsoft.com/office/drawing/2014/main" id="{D4CF51EB-EBB9-168E-39A2-C90750D9E3BF}"/>
+                <a16:creationId xmlns:a16="http://schemas.microsoft.com/office/drawing/2014/main" id="{F913963F-3A4B-C748-C8E3-D4EEE6EE008B}"/>
               </a:ext>
             </a:extLst>
           </p:cNvPr>
@@ -2162,7 +2162,7 @@
           <p:cNvPr id="3" name="日付プレースホルダー 2">
             <a:extLst>
               <a:ext uri="{FF2B5EF4-FFF2-40B4-BE49-F238E27FC236}">
-                <a16:creationId xmlns:a16="http://schemas.microsoft.com/office/drawing/2014/main" id="{2ED4AE6C-9EB5-9654-3AD6-2929B212D82D}"/>
+                <a16:creationId xmlns:a16="http://schemas.microsoft.com/office/drawing/2014/main" id="{67149508-E359-2D5D-FFD3-82D3EE537339}"/>
               </a:ext>
             </a:extLst>
           </p:cNvPr>
@@ -2178,7 +2178,7 @@
           <a:bodyPr/>
           <a:lstStyle/>
           <a:p>
-            <a:fld id="{2F9DD6D7-D718-4B09-B399-2A4D4643B2E6}" type="datetimeFigureOut">
+            <a:fld id="{9FF39823-9F7C-4473-B22B-C0B3B985F780}" type="datetimeFigureOut">
               <a:rPr kumimoji="1" lang="ja-JP" altLang="en-US" smtClean="0"/>
               <a:t>2026/7/30</a:t>
             </a:fld>
@@ -2191,7 +2191,7 @@
           <p:cNvPr id="4" name="フッター プレースホルダー 3">
             <a:extLst>
               <a:ext uri="{FF2B5EF4-FFF2-40B4-BE49-F238E27FC236}">
-                <a16:creationId xmlns:a16="http://schemas.microsoft.com/office/drawing/2014/main" id="{2C78FB93-E45E-D2B2-14F7-712E76958128}"/>
+                <a16:creationId xmlns:a16="http://schemas.microsoft.com/office/drawing/2014/main" id="{7085FEE8-93B7-D9C5-6941-587D6D56C77D}"/>
               </a:ext>
             </a:extLst>
           </p:cNvPr>
@@ -2216,7 +2216,7 @@
           <p:cNvPr id="5" name="スライド番号プレースホルダー 4">
             <a:extLst>
               <a:ext uri="{FF2B5EF4-FFF2-40B4-BE49-F238E27FC236}">
-                <a16:creationId xmlns:a16="http://schemas.microsoft.com/office/drawing/2014/main" id="{D2F5B3FA-0951-FA82-3795-5DE78D96F4B2}"/>
+                <a16:creationId xmlns:a16="http://schemas.microsoft.com/office/drawing/2014/main" id="{E1CC93C6-00C5-D09F-B07E-AE1B12790963}"/>
               </a:ext>
             </a:extLst>
           </p:cNvPr>
@@ -2232,7 +2232,7 @@
           <a:bodyPr/>
           <a:lstStyle/>
           <a:p>
-            <a:fld id="{38BDA9F7-CA3A-475F-9FB9-344FD4873BBF}" type="slidenum">
+            <a:fld id="{CAD3AFF4-7F8C-4E27-95AB-1697E9F409A7}" type="slidenum">
               <a:rPr kumimoji="1" lang="ja-JP" altLang="en-US" smtClean="0"/>
               <a:t>‹#›</a:t>
             </a:fld>
@@ -2243,7 +2243,7 @@
     </p:spTree>
     <p:extLst>
       <p:ext uri="{BB962C8B-B14F-4D97-AF65-F5344CB8AC3E}">
-        <p14:creationId xmlns:p14="http://schemas.microsoft.com/office/powerpoint/2010/main" val="2733814735"/>
+        <p14:creationId xmlns:p14="http://schemas.microsoft.com/office/powerpoint/2010/main" val="164719614"/>
       </p:ext>
     </p:extLst>
   </p:cSld>
@@ -2275,7 +2275,7 @@
           <p:cNvPr id="2" name="日付プレースホルダー 1">
             <a:extLst>
               <a:ext uri="{FF2B5EF4-FFF2-40B4-BE49-F238E27FC236}">
-                <a16:creationId xmlns:a16="http://schemas.microsoft.com/office/drawing/2014/main" id="{F49D4777-75F3-C5E1-7A35-2484338F87F1}"/>
+                <a16:creationId xmlns:a16="http://schemas.microsoft.com/office/drawing/2014/main" id="{F7DB107F-01B0-E5B9-87F0-D1F32EC7DC5E}"/>
               </a:ext>
             </a:extLst>
           </p:cNvPr>
@@ -2291,7 +2291,7 @@
           <a:bodyPr/>
           <a:lstStyle/>
           <a:p>
-            <a:fld id="{2F9DD6D7-D718-4B09-B399-2A4D4643B2E6}" type="datetimeFigureOut">
+            <a:fld id="{9FF39823-9F7C-4473-B22B-C0B3B985F780}" type="datetimeFigureOut">
               <a:rPr kumimoji="1" lang="ja-JP" altLang="en-US" smtClean="0"/>
               <a:t>2026/7/30</a:t>
             </a:fld>
@@ -2304,7 +2304,7 @@
           <p:cNvPr id="3" name="フッター プレースホルダー 2">
             <a:extLst>
               <a:ext uri="{FF2B5EF4-FFF2-40B4-BE49-F238E27FC236}">
-                <a16:creationId xmlns:a16="http://schemas.microsoft.com/office/drawing/2014/main" id="{FD3BDE5D-78BD-3A6C-B6FE-9B555DAA7093}"/>
+                <a16:creationId xmlns:a16="http://schemas.microsoft.com/office/drawing/2014/main" id="{E741805E-EB83-C40E-C338-417B19360A92}"/>
               </a:ext>
             </a:extLst>
           </p:cNvPr>
@@ -2329,7 +2329,7 @@
           <p:cNvPr id="4" name="スライド番号プレースホルダー 3">
             <a:extLst>
               <a:ext uri="{FF2B5EF4-FFF2-40B4-BE49-F238E27FC236}">
-                <a16:creationId xmlns:a16="http://schemas.microsoft.com/office/drawing/2014/main" id="{C4C41778-B834-CCF1-5B1C-275C967CF121}"/>
+                <a16:creationId xmlns:a16="http://schemas.microsoft.com/office/drawing/2014/main" id="{5B836854-BC96-6922-AE7A-81CF9C398D53}"/>
               </a:ext>
             </a:extLst>
           </p:cNvPr>
@@ -2345,7 +2345,7 @@
           <a:bodyPr/>
           <a:lstStyle/>
           <a:p>
-            <a:fld id="{38BDA9F7-CA3A-475F-9FB9-344FD4873BBF}" type="slidenum">
+            <a:fld id="{CAD3AFF4-7F8C-4E27-95AB-1697E9F409A7}" type="slidenum">
               <a:rPr kumimoji="1" lang="ja-JP" altLang="en-US" smtClean="0"/>
               <a:t>‹#›</a:t>
             </a:fld>
@@ -2356,7 +2356,7 @@
     </p:spTree>
     <p:extLst>
       <p:ext uri="{BB962C8B-B14F-4D97-AF65-F5344CB8AC3E}">
-        <p14:creationId xmlns:p14="http://schemas.microsoft.com/office/powerpoint/2010/main" val="2146680439"/>
+        <p14:creationId xmlns:p14="http://schemas.microsoft.com/office/powerpoint/2010/main" val="3084015565"/>
       </p:ext>
     </p:extLst>
   </p:cSld>
@@ -2388,7 +2388,7 @@
           <p:cNvPr id="2" name="タイトル 1">
             <a:extLst>
               <a:ext uri="{FF2B5EF4-FFF2-40B4-BE49-F238E27FC236}">
-                <a16:creationId xmlns:a16="http://schemas.microsoft.com/office/drawing/2014/main" id="{FE6DE822-DE03-252F-5B54-54B4E48E59EE}"/>
+                <a16:creationId xmlns:a16="http://schemas.microsoft.com/office/drawing/2014/main" id="{FEFEBFB1-B637-BAF8-0CD3-C36B2723F8CA}"/>
               </a:ext>
             </a:extLst>
           </p:cNvPr>
@@ -2425,7 +2425,7 @@
           <p:cNvPr id="3" name="コンテンツ プレースホルダー 2">
             <a:extLst>
               <a:ext uri="{FF2B5EF4-FFF2-40B4-BE49-F238E27FC236}">
-                <a16:creationId xmlns:a16="http://schemas.microsoft.com/office/drawing/2014/main" id="{5B47CE9B-6E49-2895-9A1D-D21EF12E96B6}"/>
+                <a16:creationId xmlns:a16="http://schemas.microsoft.com/office/drawing/2014/main" id="{A0A84DF9-499E-31FF-D375-932B50CFFFA7}"/>
               </a:ext>
             </a:extLst>
           </p:cNvPr>
@@ -2547,7 +2547,7 @@
           <p:cNvPr id="4" name="テキスト プレースホルダー 3">
             <a:extLst>
               <a:ext uri="{FF2B5EF4-FFF2-40B4-BE49-F238E27FC236}">
-                <a16:creationId xmlns:a16="http://schemas.microsoft.com/office/drawing/2014/main" id="{DFB6397A-38C8-86DC-0044-7C67F4488978}"/>
+                <a16:creationId xmlns:a16="http://schemas.microsoft.com/office/drawing/2014/main" id="{173FDBEC-8111-272B-B3D4-AFD8C4CB7E79}"/>
               </a:ext>
             </a:extLst>
           </p:cNvPr>
@@ -2618,7 +2618,7 @@
           <p:cNvPr id="5" name="日付プレースホルダー 4">
             <a:extLst>
               <a:ext uri="{FF2B5EF4-FFF2-40B4-BE49-F238E27FC236}">
-                <a16:creationId xmlns:a16="http://schemas.microsoft.com/office/drawing/2014/main" id="{9C865FEE-1349-BF15-94D7-7183B2A4A7D8}"/>
+                <a16:creationId xmlns:a16="http://schemas.microsoft.com/office/drawing/2014/main" id="{83F89D29-57E5-1E20-4134-CCF2EF5A6471}"/>
               </a:ext>
             </a:extLst>
           </p:cNvPr>
@@ -2634,7 +2634,7 @@
           <a:bodyPr/>
           <a:lstStyle/>
           <a:p>
-            <a:fld id="{2F9DD6D7-D718-4B09-B399-2A4D4643B2E6}" type="datetimeFigureOut">
+            <a:fld id="{9FF39823-9F7C-4473-B22B-C0B3B985F780}" type="datetimeFigureOut">
               <a:rPr kumimoji="1" lang="ja-JP" altLang="en-US" smtClean="0"/>
               <a:t>2026/7/30</a:t>
             </a:fld>
@@ -2647,7 +2647,7 @@
           <p:cNvPr id="6" name="フッター プレースホルダー 5">
             <a:extLst>
               <a:ext uri="{FF2B5EF4-FFF2-40B4-BE49-F238E27FC236}">
-                <a16:creationId xmlns:a16="http://schemas.microsoft.com/office/drawing/2014/main" id="{5420D6E7-DB56-DB74-A95B-82C55E0BEC07}"/>
+                <a16:creationId xmlns:a16="http://schemas.microsoft.com/office/drawing/2014/main" id="{D9857F91-B3BD-583E-6FD6-4046818515F6}"/>
               </a:ext>
             </a:extLst>
           </p:cNvPr>
@@ -2672,7 +2672,7 @@
           <p:cNvPr id="7" name="スライド番号プレースホルダー 6">
             <a:extLst>
               <a:ext uri="{FF2B5EF4-FFF2-40B4-BE49-F238E27FC236}">
-                <a16:creationId xmlns:a16="http://schemas.microsoft.com/office/drawing/2014/main" id="{41FB11BD-42C6-17AF-FE93-5A63460FA361}"/>
+                <a16:creationId xmlns:a16="http://schemas.microsoft.com/office/drawing/2014/main" id="{7F258482-34BB-751C-EA67-2AB85D815D3C}"/>
               </a:ext>
             </a:extLst>
           </p:cNvPr>
@@ -2688,7 +2688,7 @@
           <a:bodyPr/>
           <a:lstStyle/>
           <a:p>
-            <a:fld id="{38BDA9F7-CA3A-475F-9FB9-344FD4873BBF}" type="slidenum">
+            <a:fld id="{CAD3AFF4-7F8C-4E27-95AB-1697E9F409A7}" type="slidenum">
               <a:rPr kumimoji="1" lang="ja-JP" altLang="en-US" smtClean="0"/>
               <a:t>‹#›</a:t>
             </a:fld>
@@ -2699,7 +2699,7 @@
     </p:spTree>
     <p:extLst>
       <p:ext uri="{BB962C8B-B14F-4D97-AF65-F5344CB8AC3E}">
-        <p14:creationId xmlns:p14="http://schemas.microsoft.com/office/powerpoint/2010/main" val="8304043"/>
+        <p14:creationId xmlns:p14="http://schemas.microsoft.com/office/powerpoint/2010/main" val="1646249545"/>
       </p:ext>
     </p:extLst>
   </p:cSld>
@@ -2731,7 +2731,7 @@
           <p:cNvPr id="2" name="タイトル 1">
             <a:extLst>
               <a:ext uri="{FF2B5EF4-FFF2-40B4-BE49-F238E27FC236}">
-                <a16:creationId xmlns:a16="http://schemas.microsoft.com/office/drawing/2014/main" id="{1A7592C5-BA01-3D24-412B-52504AD6F92B}"/>
+                <a16:creationId xmlns:a16="http://schemas.microsoft.com/office/drawing/2014/main" id="{651D04F4-731F-7B97-0932-519534B108A5}"/>
               </a:ext>
             </a:extLst>
           </p:cNvPr>
@@ -2768,7 +2768,7 @@
           <p:cNvPr id="3" name="図プレースホルダー 2">
             <a:extLst>
               <a:ext uri="{FF2B5EF4-FFF2-40B4-BE49-F238E27FC236}">
-                <a16:creationId xmlns:a16="http://schemas.microsoft.com/office/drawing/2014/main" id="{90DD3C8D-74EE-7A26-C00C-53ECF9435FC9}"/>
+                <a16:creationId xmlns:a16="http://schemas.microsoft.com/office/drawing/2014/main" id="{78A9C7B0-4175-BABF-0C29-231638F107B9}"/>
               </a:ext>
             </a:extLst>
           </p:cNvPr>
@@ -2835,7 +2835,7 @@
           <p:cNvPr id="4" name="テキスト プレースホルダー 3">
             <a:extLst>
               <a:ext uri="{FF2B5EF4-FFF2-40B4-BE49-F238E27FC236}">
-                <a16:creationId xmlns:a16="http://schemas.microsoft.com/office/drawing/2014/main" id="{C1A6FD52-9B4B-1A81-BE5C-6237021B1B0C}"/>
+                <a16:creationId xmlns:a16="http://schemas.microsoft.com/office/drawing/2014/main" id="{E33A3631-2E90-05A0-7EBE-22489254F3BC}"/>
               </a:ext>
             </a:extLst>
           </p:cNvPr>
@@ -2906,7 +2906,7 @@
           <p:cNvPr id="5" name="日付プレースホルダー 4">
             <a:extLst>
               <a:ext uri="{FF2B5EF4-FFF2-40B4-BE49-F238E27FC236}">
-                <a16:creationId xmlns:a16="http://schemas.microsoft.com/office/drawing/2014/main" id="{5291EB96-D9F8-9D49-0362-5689F6FBF423}"/>
+                <a16:creationId xmlns:a16="http://schemas.microsoft.com/office/drawing/2014/main" id="{15C19373-99B2-3E0E-1843-4CA865878C63}"/>
               </a:ext>
             </a:extLst>
           </p:cNvPr>
@@ -2922,7 +2922,7 @@
           <a:bodyPr/>
           <a:lstStyle/>
           <a:p>
-            <a:fld id="{2F9DD6D7-D718-4B09-B399-2A4D4643B2E6}" type="datetimeFigureOut">
+            <a:fld id="{9FF39823-9F7C-4473-B22B-C0B3B985F780}" type="datetimeFigureOut">
               <a:rPr kumimoji="1" lang="ja-JP" altLang="en-US" smtClean="0"/>
               <a:t>2026/7/30</a:t>
             </a:fld>
@@ -2935,7 +2935,7 @@
           <p:cNvPr id="6" name="フッター プレースホルダー 5">
             <a:extLst>
               <a:ext uri="{FF2B5EF4-FFF2-40B4-BE49-F238E27FC236}">
-                <a16:creationId xmlns:a16="http://schemas.microsoft.com/office/drawing/2014/main" id="{2AA77A1C-C1E7-ED71-424E-A8D0D71C05A7}"/>
+                <a16:creationId xmlns:a16="http://schemas.microsoft.com/office/drawing/2014/main" id="{A99E0F87-E5B9-BF6C-E750-1F3A97CD5E1F}"/>
               </a:ext>
             </a:extLst>
           </p:cNvPr>
@@ -2960,7 +2960,7 @@
           <p:cNvPr id="7" name="スライド番号プレースホルダー 6">
             <a:extLst>
               <a:ext uri="{FF2B5EF4-FFF2-40B4-BE49-F238E27FC236}">
-                <a16:creationId xmlns:a16="http://schemas.microsoft.com/office/drawing/2014/main" id="{BC3123F9-C6AD-30A9-AC10-90D12E186457}"/>
+                <a16:creationId xmlns:a16="http://schemas.microsoft.com/office/drawing/2014/main" id="{090F6205-DE60-CD78-C09B-51CE15E17822}"/>
               </a:ext>
             </a:extLst>
           </p:cNvPr>
@@ -2976,7 +2976,7 @@
           <a:bodyPr/>
           <a:lstStyle/>
           <a:p>
-            <a:fld id="{38BDA9F7-CA3A-475F-9FB9-344FD4873BBF}" type="slidenum">
+            <a:fld id="{CAD3AFF4-7F8C-4E27-95AB-1697E9F409A7}" type="slidenum">
               <a:rPr kumimoji="1" lang="ja-JP" altLang="en-US" smtClean="0"/>
               <a:t>‹#›</a:t>
             </a:fld>
@@ -2987,7 +2987,7 @@
     </p:spTree>
     <p:extLst>
       <p:ext uri="{BB962C8B-B14F-4D97-AF65-F5344CB8AC3E}">
-        <p14:creationId xmlns:p14="http://schemas.microsoft.com/office/powerpoint/2010/main" val="2105776463"/>
+        <p14:creationId xmlns:p14="http://schemas.microsoft.com/office/powerpoint/2010/main" val="4196415803"/>
       </p:ext>
     </p:extLst>
   </p:cSld>
@@ -3024,7 +3024,7 @@
           <p:cNvPr id="2" name="タイトル プレースホルダー 1">
             <a:extLst>
               <a:ext uri="{FF2B5EF4-FFF2-40B4-BE49-F238E27FC236}">
-                <a16:creationId xmlns:a16="http://schemas.microsoft.com/office/drawing/2014/main" id="{1222C194-02A4-070C-2B64-2EEBDCFA7FF8}"/>
+                <a16:creationId xmlns:a16="http://schemas.microsoft.com/office/drawing/2014/main" id="{DA0FF87B-3248-6FDF-23BE-F07248D2129A}"/>
               </a:ext>
             </a:extLst>
           </p:cNvPr>
@@ -3062,7 +3062,7 @@
           <p:cNvPr id="3" name="テキスト プレースホルダー 2">
             <a:extLst>
               <a:ext uri="{FF2B5EF4-FFF2-40B4-BE49-F238E27FC236}">
-                <a16:creationId xmlns:a16="http://schemas.microsoft.com/office/drawing/2014/main" id="{4A448577-91C9-AA0D-6F28-892210A1FC89}"/>
+                <a16:creationId xmlns:a16="http://schemas.microsoft.com/office/drawing/2014/main" id="{56B9C771-6277-0D2C-E5AC-2C80E9102383}"/>
               </a:ext>
             </a:extLst>
           </p:cNvPr>
@@ -3161,7 +3161,7 @@
           <p:cNvPr id="4" name="日付プレースホルダー 3">
             <a:extLst>
               <a:ext uri="{FF2B5EF4-FFF2-40B4-BE49-F238E27FC236}">
-                <a16:creationId xmlns:a16="http://schemas.microsoft.com/office/drawing/2014/main" id="{ADCA87CF-5C58-686C-1B3E-1ECB466021A1}"/>
+                <a16:creationId xmlns:a16="http://schemas.microsoft.com/office/drawing/2014/main" id="{8B67ED47-6229-495E-D35E-405C80FB7EB2}"/>
               </a:ext>
             </a:extLst>
           </p:cNvPr>
@@ -3195,7 +3195,7 @@
             </a:lvl1pPr>
           </a:lstStyle>
           <a:p>
-            <a:fld id="{2F9DD6D7-D718-4B09-B399-2A4D4643B2E6}" type="datetimeFigureOut">
+            <a:fld id="{9FF39823-9F7C-4473-B22B-C0B3B985F780}" type="datetimeFigureOut">
               <a:rPr kumimoji="1" lang="ja-JP" altLang="en-US" smtClean="0"/>
               <a:t>2026/7/30</a:t>
             </a:fld>
@@ -3208,7 +3208,7 @@
           <p:cNvPr id="5" name="フッター プレースホルダー 4">
             <a:extLst>
               <a:ext uri="{FF2B5EF4-FFF2-40B4-BE49-F238E27FC236}">
-                <a16:creationId xmlns:a16="http://schemas.microsoft.com/office/drawing/2014/main" id="{8D9F1A6D-0F01-650C-2B8D-CBECF920C95A}"/>
+                <a16:creationId xmlns:a16="http://schemas.microsoft.com/office/drawing/2014/main" id="{37A8F4BC-83C3-ED2C-0E1D-4FD2BD18D2A5}"/>
               </a:ext>
             </a:extLst>
           </p:cNvPr>
@@ -3251,7 +3251,7 @@
           <p:cNvPr id="6" name="スライド番号プレースホルダー 5">
             <a:extLst>
               <a:ext uri="{FF2B5EF4-FFF2-40B4-BE49-F238E27FC236}">
-                <a16:creationId xmlns:a16="http://schemas.microsoft.com/office/drawing/2014/main" id="{72085661-DF36-DE20-5858-9E71E3BB892C}"/>
+                <a16:creationId xmlns:a16="http://schemas.microsoft.com/office/drawing/2014/main" id="{37A1A5FC-10CF-A9B9-0879-F8F9A61E9FFF}"/>
               </a:ext>
             </a:extLst>
           </p:cNvPr>
@@ -3285,7 +3285,7 @@
             </a:lvl1pPr>
           </a:lstStyle>
           <a:p>
-            <a:fld id="{38BDA9F7-CA3A-475F-9FB9-344FD4873BBF}" type="slidenum">
+            <a:fld id="{CAD3AFF4-7F8C-4E27-95AB-1697E9F409A7}" type="slidenum">
               <a:rPr kumimoji="1" lang="ja-JP" altLang="en-US" smtClean="0"/>
               <a:t>‹#›</a:t>
             </a:fld>
@@ -3296,7 +3296,7 @@
     </p:spTree>
     <p:extLst>
       <p:ext uri="{BB962C8B-B14F-4D97-AF65-F5344CB8AC3E}">
-        <p14:creationId xmlns:p14="http://schemas.microsoft.com/office/powerpoint/2010/main" val="4257814636"/>
+        <p14:creationId xmlns:p14="http://schemas.microsoft.com/office/powerpoint/2010/main" val="1766742948"/>
       </p:ext>
     </p:extLst>
   </p:cSld>
@@ -3619,7 +3619,7 @@
           <p:cNvPr id="2" name="テキスト ボックス 1">
             <a:extLst>
               <a:ext uri="{FF2B5EF4-FFF2-40B4-BE49-F238E27FC236}">
-                <a16:creationId xmlns:a16="http://schemas.microsoft.com/office/drawing/2014/main" id="{2CF60290-7434-7CA5-D837-DC4FC2997D41}"/>
+                <a16:creationId xmlns:a16="http://schemas.microsoft.com/office/drawing/2014/main" id="{E2C82097-774A-CECA-A58E-C2970634B2F6}"/>
               </a:ext>
             </a:extLst>
           </p:cNvPr>
@@ -3665,7 +3665,7 @@
           <p:cNvPr id="3" name="テキスト ボックス 2">
             <a:extLst>
               <a:ext uri="{FF2B5EF4-FFF2-40B4-BE49-F238E27FC236}">
-                <a16:creationId xmlns:a16="http://schemas.microsoft.com/office/drawing/2014/main" id="{4CA88871-C446-E21B-3E4A-C0E458BC33C5}"/>
+                <a16:creationId xmlns:a16="http://schemas.microsoft.com/office/drawing/2014/main" id="{C64E92FA-E1D3-09B0-7547-A4329BC967E4}"/>
               </a:ext>
             </a:extLst>
           </p:cNvPr>
@@ -3714,7 +3714,7 @@
           <p:cNvPr id="4" name="テキスト ボックス 3">
             <a:extLst>
               <a:ext uri="{FF2B5EF4-FFF2-40B4-BE49-F238E27FC236}">
-                <a16:creationId xmlns:a16="http://schemas.microsoft.com/office/drawing/2014/main" id="{1F8FDCF5-9596-F7E6-0C1C-7ED026F5F63C}"/>
+                <a16:creationId xmlns:a16="http://schemas.microsoft.com/office/drawing/2014/main" id="{78B9D59E-307E-E1CF-F4D6-1E4901DB9957}"/>
               </a:ext>
             </a:extLst>
           </p:cNvPr>
@@ -3754,7 +3754,7 @@
           <p:cNvPr id="5" name="テキスト ボックス 4">
             <a:extLst>
               <a:ext uri="{FF2B5EF4-FFF2-40B4-BE49-F238E27FC236}">
-                <a16:creationId xmlns:a16="http://schemas.microsoft.com/office/drawing/2014/main" id="{2E22DB4F-11B0-6EC9-7C7A-2152B11A104D}"/>
+                <a16:creationId xmlns:a16="http://schemas.microsoft.com/office/drawing/2014/main" id="{4860A2C1-65ED-C0BF-D82F-4718579A3041}"/>
               </a:ext>
             </a:extLst>
           </p:cNvPr>
@@ -3801,7 +3801,7 @@
             <a:hlinkClick r:id="" action="ppaction://media"/>
             <a:extLst>
               <a:ext uri="{FF2B5EF4-FFF2-40B4-BE49-F238E27FC236}">
-                <a16:creationId xmlns:a16="http://schemas.microsoft.com/office/drawing/2014/main" id="{EDB02D61-D240-B96C-41A9-885B1ABE5C43}"/>
+                <a16:creationId xmlns:a16="http://schemas.microsoft.com/office/drawing/2014/main" id="{FC010B41-F9CA-6C5C-3889-83DAD5BEDD61}"/>
               </a:ext>
             </a:extLst>
           </p:cNvPr>
@@ -3836,7 +3836,7 @@
     </p:spTree>
     <p:extLst>
       <p:ext uri="{BB962C8B-B14F-4D97-AF65-F5344CB8AC3E}">
-        <p14:creationId xmlns:p14="http://schemas.microsoft.com/office/powerpoint/2010/main" val="1741468337"/>
+        <p14:creationId xmlns:p14="http://schemas.microsoft.com/office/powerpoint/2010/main" val="1579078366"/>
       </p:ext>
     </p:extLst>
   </p:cSld>
@@ -3960,7 +3960,7 @@
           <p:cNvPr id="2" name="テキスト ボックス 1">
             <a:extLst>
               <a:ext uri="{FF2B5EF4-FFF2-40B4-BE49-F238E27FC236}">
-                <a16:creationId xmlns:a16="http://schemas.microsoft.com/office/drawing/2014/main" id="{EE2096AD-1C8B-7B1A-CB21-81C2E9F88AF8}"/>
+                <a16:creationId xmlns:a16="http://schemas.microsoft.com/office/drawing/2014/main" id="{9D4BD964-A54E-44FA-A3B7-7C98495F8511}"/>
               </a:ext>
             </a:extLst>
           </p:cNvPr>
@@ -4006,7 +4006,7 @@
           <p:cNvPr id="3" name="テキスト ボックス 2">
             <a:extLst>
               <a:ext uri="{FF2B5EF4-FFF2-40B4-BE49-F238E27FC236}">
-                <a16:creationId xmlns:a16="http://schemas.microsoft.com/office/drawing/2014/main" id="{3D08CB21-65A0-1FE7-CEB1-04667A7E6FE1}"/>
+                <a16:creationId xmlns:a16="http://schemas.microsoft.com/office/drawing/2014/main" id="{7F755325-8E72-FCC2-D406-9D119AB124F4}"/>
               </a:ext>
             </a:extLst>
           </p:cNvPr>
@@ -4046,7 +4046,7 @@
           <p:cNvPr id="4" name="テキスト ボックス 3">
             <a:extLst>
               <a:ext uri="{FF2B5EF4-FFF2-40B4-BE49-F238E27FC236}">
-                <a16:creationId xmlns:a16="http://schemas.microsoft.com/office/drawing/2014/main" id="{7B94821C-E2CC-B451-6748-0270E9F119DB}"/>
+                <a16:creationId xmlns:a16="http://schemas.microsoft.com/office/drawing/2014/main" id="{DB949BB9-3F90-864E-FBCE-A7C5DBA18173}"/>
               </a:ext>
             </a:extLst>
           </p:cNvPr>
@@ -4128,7 +4128,7 @@
           <p:cNvPr id="5" name="テキスト ボックス 4">
             <a:extLst>
               <a:ext uri="{FF2B5EF4-FFF2-40B4-BE49-F238E27FC236}">
-                <a16:creationId xmlns:a16="http://schemas.microsoft.com/office/drawing/2014/main" id="{B5AD0A1E-3CE3-49BE-6892-C93DC08D5C97}"/>
+                <a16:creationId xmlns:a16="http://schemas.microsoft.com/office/drawing/2014/main" id="{E536A486-24B2-93A7-B7AC-5BC5DE804C07}"/>
               </a:ext>
             </a:extLst>
           </p:cNvPr>
@@ -4175,7 +4175,7 @@
             <a:hlinkClick r:id="" action="ppaction://media"/>
             <a:extLst>
               <a:ext uri="{FF2B5EF4-FFF2-40B4-BE49-F238E27FC236}">
-                <a16:creationId xmlns:a16="http://schemas.microsoft.com/office/drawing/2014/main" id="{6429DE14-17C6-CEEE-E9A9-7496D7794CF5}"/>
+                <a16:creationId xmlns:a16="http://schemas.microsoft.com/office/drawing/2014/main" id="{6388ABF5-80CC-D757-0314-41295AE427A5}"/>
               </a:ext>
             </a:extLst>
           </p:cNvPr>
@@ -4210,7 +4210,7 @@
     </p:spTree>
     <p:extLst>
       <p:ext uri="{BB962C8B-B14F-4D97-AF65-F5344CB8AC3E}">
-        <p14:creationId xmlns:p14="http://schemas.microsoft.com/office/powerpoint/2010/main" val="3069214498"/>
+        <p14:creationId xmlns:p14="http://schemas.microsoft.com/office/powerpoint/2010/main" val="3485994993"/>
       </p:ext>
     </p:extLst>
   </p:cSld>
@@ -4334,7 +4334,7 @@
           <p:cNvPr id="2" name="テキスト ボックス 1">
             <a:extLst>
               <a:ext uri="{FF2B5EF4-FFF2-40B4-BE49-F238E27FC236}">
-                <a16:creationId xmlns:a16="http://schemas.microsoft.com/office/drawing/2014/main" id="{137EBC60-0B39-8BA1-6AAF-EDE1472C5266}"/>
+                <a16:creationId xmlns:a16="http://schemas.microsoft.com/office/drawing/2014/main" id="{9A5FD89D-510D-31EE-8A6D-635C5219A39E}"/>
               </a:ext>
             </a:extLst>
           </p:cNvPr>
@@ -4380,7 +4380,7 @@
           <p:cNvPr id="3" name="テキスト ボックス 2">
             <a:extLst>
               <a:ext uri="{FF2B5EF4-FFF2-40B4-BE49-F238E27FC236}">
-                <a16:creationId xmlns:a16="http://schemas.microsoft.com/office/drawing/2014/main" id="{03AB43AF-11C8-E5BC-D25C-925F3847949C}"/>
+                <a16:creationId xmlns:a16="http://schemas.microsoft.com/office/drawing/2014/main" id="{82B06431-C721-2910-9D63-A1434C2A5331}"/>
               </a:ext>
             </a:extLst>
           </p:cNvPr>
@@ -4420,7 +4420,7 @@
           <p:cNvPr id="4" name="テキスト ボックス 3">
             <a:extLst>
               <a:ext uri="{FF2B5EF4-FFF2-40B4-BE49-F238E27FC236}">
-                <a16:creationId xmlns:a16="http://schemas.microsoft.com/office/drawing/2014/main" id="{75C8BFE0-93DA-D4ED-E627-819D4BD33414}"/>
+                <a16:creationId xmlns:a16="http://schemas.microsoft.com/office/drawing/2014/main" id="{2B8737C5-5497-6EE8-EAB6-3C5463B7E5C6}"/>
               </a:ext>
             </a:extLst>
           </p:cNvPr>
@@ -4515,7 +4515,7 @@
           <p:cNvPr id="5" name="テキスト ボックス 4">
             <a:extLst>
               <a:ext uri="{FF2B5EF4-FFF2-40B4-BE49-F238E27FC236}">
-                <a16:creationId xmlns:a16="http://schemas.microsoft.com/office/drawing/2014/main" id="{7FC89DB5-2F48-65E9-6FEF-D9C483981A3B}"/>
+                <a16:creationId xmlns:a16="http://schemas.microsoft.com/office/drawing/2014/main" id="{DC157586-7754-C298-100B-4C4C9E605617}"/>
               </a:ext>
             </a:extLst>
           </p:cNvPr>
@@ -4562,7 +4562,7 @@
             <a:hlinkClick r:id="" action="ppaction://media"/>
             <a:extLst>
               <a:ext uri="{FF2B5EF4-FFF2-40B4-BE49-F238E27FC236}">
-                <a16:creationId xmlns:a16="http://schemas.microsoft.com/office/drawing/2014/main" id="{B5931768-C51E-72D4-20E4-BA96F43BDE6E}"/>
+                <a16:creationId xmlns:a16="http://schemas.microsoft.com/office/drawing/2014/main" id="{C4FCC126-5867-31F8-ABEF-CFCD94D33CAC}"/>
               </a:ext>
             </a:extLst>
           </p:cNvPr>
@@ -4597,7 +4597,7 @@
     </p:spTree>
     <p:extLst>
       <p:ext uri="{BB962C8B-B14F-4D97-AF65-F5344CB8AC3E}">
-        <p14:creationId xmlns:p14="http://schemas.microsoft.com/office/powerpoint/2010/main" val="2152312840"/>
+        <p14:creationId xmlns:p14="http://schemas.microsoft.com/office/powerpoint/2010/main" val="1457066412"/>
       </p:ext>
     </p:extLst>
   </p:cSld>
@@ -4721,7 +4721,7 @@
           <p:cNvPr id="2" name="テキスト ボックス 1">
             <a:extLst>
               <a:ext uri="{FF2B5EF4-FFF2-40B4-BE49-F238E27FC236}">
-                <a16:creationId xmlns:a16="http://schemas.microsoft.com/office/drawing/2014/main" id="{4C104F97-B3F4-0603-A04C-6F43328613B3}"/>
+                <a16:creationId xmlns:a16="http://schemas.microsoft.com/office/drawing/2014/main" id="{ABF7BD53-B7BE-4A56-FA59-44B4E3BFA47B}"/>
               </a:ext>
             </a:extLst>
           </p:cNvPr>
@@ -4767,7 +4767,7 @@
           <p:cNvPr id="3" name="テキスト ボックス 2">
             <a:extLst>
               <a:ext uri="{FF2B5EF4-FFF2-40B4-BE49-F238E27FC236}">
-                <a16:creationId xmlns:a16="http://schemas.microsoft.com/office/drawing/2014/main" id="{8AA7B194-CD94-87FC-57FE-3A2468FBC4F0}"/>
+                <a16:creationId xmlns:a16="http://schemas.microsoft.com/office/drawing/2014/main" id="{0C9AF9E6-629E-7373-B285-007EF4D9E4F1}"/>
               </a:ext>
             </a:extLst>
           </p:cNvPr>
@@ -4807,7 +4807,7 @@
           <p:cNvPr id="4" name="テキスト ボックス 3">
             <a:extLst>
               <a:ext uri="{FF2B5EF4-FFF2-40B4-BE49-F238E27FC236}">
-                <a16:creationId xmlns:a16="http://schemas.microsoft.com/office/drawing/2014/main" id="{20F5500E-FF52-3541-66DF-C9460CD1D181}"/>
+                <a16:creationId xmlns:a16="http://schemas.microsoft.com/office/drawing/2014/main" id="{161E51D8-77DA-D0CC-24DD-A30F5AA59FC8}"/>
               </a:ext>
             </a:extLst>
           </p:cNvPr>
@@ -4917,7 +4917,7 @@
           <p:cNvPr id="5" name="テキスト ボックス 4">
             <a:extLst>
               <a:ext uri="{FF2B5EF4-FFF2-40B4-BE49-F238E27FC236}">
-                <a16:creationId xmlns:a16="http://schemas.microsoft.com/office/drawing/2014/main" id="{7BA22171-9288-35BB-E7C1-1833FAA2B6E0}"/>
+                <a16:creationId xmlns:a16="http://schemas.microsoft.com/office/drawing/2014/main" id="{F5B9B21A-AA98-2A4A-0DE8-2D51415F1127}"/>
               </a:ext>
             </a:extLst>
           </p:cNvPr>
@@ -4964,7 +4964,7 @@
             <a:hlinkClick r:id="" action="ppaction://media"/>
             <a:extLst>
               <a:ext uri="{FF2B5EF4-FFF2-40B4-BE49-F238E27FC236}">
-                <a16:creationId xmlns:a16="http://schemas.microsoft.com/office/drawing/2014/main" id="{BC08282C-F358-6BDF-58A6-F2779BB0C109}"/>
+                <a16:creationId xmlns:a16="http://schemas.microsoft.com/office/drawing/2014/main" id="{2A2BF4B0-F462-34F6-98EA-D643429547B2}"/>
               </a:ext>
             </a:extLst>
           </p:cNvPr>
@@ -4999,7 +4999,7 @@
     </p:spTree>
     <p:extLst>
       <p:ext uri="{BB962C8B-B14F-4D97-AF65-F5344CB8AC3E}">
-        <p14:creationId xmlns:p14="http://schemas.microsoft.com/office/powerpoint/2010/main" val="2132050180"/>
+        <p14:creationId xmlns:p14="http://schemas.microsoft.com/office/powerpoint/2010/main" val="2507666212"/>
       </p:ext>
     </p:extLst>
   </p:cSld>
@@ -5123,7 +5123,7 @@
           <p:cNvPr id="2" name="テキスト ボックス 1">
             <a:extLst>
               <a:ext uri="{FF2B5EF4-FFF2-40B4-BE49-F238E27FC236}">
-                <a16:creationId xmlns:a16="http://schemas.microsoft.com/office/drawing/2014/main" id="{8AACDE10-E763-1DDF-4114-49322AE82959}"/>
+                <a16:creationId xmlns:a16="http://schemas.microsoft.com/office/drawing/2014/main" id="{630766A6-2EB3-B947-9807-3759D6F5B909}"/>
               </a:ext>
             </a:extLst>
           </p:cNvPr>
@@ -5169,7 +5169,7 @@
           <p:cNvPr id="3" name="テキスト ボックス 2">
             <a:extLst>
               <a:ext uri="{FF2B5EF4-FFF2-40B4-BE49-F238E27FC236}">
-                <a16:creationId xmlns:a16="http://schemas.microsoft.com/office/drawing/2014/main" id="{E7819271-7B65-D239-F714-4C9464B85929}"/>
+                <a16:creationId xmlns:a16="http://schemas.microsoft.com/office/drawing/2014/main" id="{50A58A48-F1E2-80A4-6624-0EFDE63197AA}"/>
               </a:ext>
             </a:extLst>
           </p:cNvPr>
@@ -5209,7 +5209,7 @@
           <p:cNvPr id="4" name="テキスト ボックス 3">
             <a:extLst>
               <a:ext uri="{FF2B5EF4-FFF2-40B4-BE49-F238E27FC236}">
-                <a16:creationId xmlns:a16="http://schemas.microsoft.com/office/drawing/2014/main" id="{B150B460-FA71-5351-C5F2-42A9543AE306}"/>
+                <a16:creationId xmlns:a16="http://schemas.microsoft.com/office/drawing/2014/main" id="{B7346B39-B3B9-BBC4-5972-BFCBBB164DD6}"/>
               </a:ext>
             </a:extLst>
           </p:cNvPr>
@@ -5233,20 +5233,14 @@
           <a:lstStyle/>
           <a:p>
             <a:r>
-              <a:rPr kumimoji="1" lang="en-US" altLang="ja-JP" sz="2000">
+              <a:rPr kumimoji="1" lang="ja-JP" altLang="en-US" sz="2000">
                 <a:solidFill>
                   <a:srgbClr val="333333"/>
                 </a:solidFill>
                 <a:latin typeface="Arial" panose="020B0604020202020204" pitchFamily="34" charset="0"/>
               </a:rPr>
-              <a:t>Set confirmed custom domain</a:t>
-            </a:r>
-            <a:endParaRPr kumimoji="1" lang="ja-JP" altLang="en-US" sz="2000">
-              <a:solidFill>
-                <a:srgbClr val="333333"/>
-              </a:solidFill>
-              <a:latin typeface="Arial" panose="020B0604020202020204" pitchFamily="34" charset="0"/>
-            </a:endParaRPr>
+              <a:t>直近のコミットでは、実装の見直しと継続的な改善が行われました。</a:t>
+            </a:r>
           </a:p>
         </p:txBody>
       </p:sp>
@@ -5255,7 +5249,7 @@
           <p:cNvPr id="5" name="テキスト ボックス 4">
             <a:extLst>
               <a:ext uri="{FF2B5EF4-FFF2-40B4-BE49-F238E27FC236}">
-                <a16:creationId xmlns:a16="http://schemas.microsoft.com/office/drawing/2014/main" id="{497E8517-32F6-AAA7-B3BC-48BFAB04DB68}"/>
+                <a16:creationId xmlns:a16="http://schemas.microsoft.com/office/drawing/2014/main" id="{60C1861D-A57E-40E3-6EEE-615D2312228B}"/>
               </a:ext>
             </a:extLst>
           </p:cNvPr>
@@ -5302,7 +5296,7 @@
             <a:hlinkClick r:id="" action="ppaction://media"/>
             <a:extLst>
               <a:ext uri="{FF2B5EF4-FFF2-40B4-BE49-F238E27FC236}">
-                <a16:creationId xmlns:a16="http://schemas.microsoft.com/office/drawing/2014/main" id="{0ED21F6B-DAAF-077F-AE83-B855E6FE373F}"/>
+                <a16:creationId xmlns:a16="http://schemas.microsoft.com/office/drawing/2014/main" id="{8FE7A036-F77D-2032-48CD-39634C3382CA}"/>
               </a:ext>
             </a:extLst>
           </p:cNvPr>
@@ -5337,7 +5331,7 @@
     </p:spTree>
     <p:extLst>
       <p:ext uri="{BB962C8B-B14F-4D97-AF65-F5344CB8AC3E}">
-        <p14:creationId xmlns:p14="http://schemas.microsoft.com/office/powerpoint/2010/main" val="80615252"/>
+        <p14:creationId xmlns:p14="http://schemas.microsoft.com/office/powerpoint/2010/main" val="3844954795"/>
       </p:ext>
     </p:extLst>
   </p:cSld>
@@ -5380,7 +5374,7 @@
                                   <p:childTnLst>
                                     <p:cmd type="call" cmd="playFrom(0.0)">
                                       <p:cBhvr>
-                                        <p:cTn id="6" dur="6451" fill="hold"/>
+                                        <p:cTn id="6" dur="6076" fill="hold"/>
                                         <p:tgtEl>
                                           <p:spTgt spid="6"/>
                                         </p:tgtEl>
@@ -5461,7 +5455,7 @@
           <p:cNvPr id="2" name="テキスト ボックス 1">
             <a:extLst>
               <a:ext uri="{FF2B5EF4-FFF2-40B4-BE49-F238E27FC236}">
-                <a16:creationId xmlns:a16="http://schemas.microsoft.com/office/drawing/2014/main" id="{943B0B59-A310-0FA7-D97B-50F8F96F7A83}"/>
+                <a16:creationId xmlns:a16="http://schemas.microsoft.com/office/drawing/2014/main" id="{6B811634-4B6D-D518-FAB8-3B5E12D52B78}"/>
               </a:ext>
             </a:extLst>
           </p:cNvPr>
@@ -5507,7 +5501,7 @@
           <p:cNvPr id="3" name="テキスト ボックス 2">
             <a:extLst>
               <a:ext uri="{FF2B5EF4-FFF2-40B4-BE49-F238E27FC236}">
-                <a16:creationId xmlns:a16="http://schemas.microsoft.com/office/drawing/2014/main" id="{7A2E6EDE-5D85-FA0D-A8A8-96703D94F199}"/>
+                <a16:creationId xmlns:a16="http://schemas.microsoft.com/office/drawing/2014/main" id="{E9B1C42E-2FD2-AA80-C4FD-F175E560CC00}"/>
               </a:ext>
             </a:extLst>
           </p:cNvPr>
@@ -5547,7 +5541,7 @@
           <p:cNvPr id="4" name="テキスト ボックス 3">
             <a:extLst>
               <a:ext uri="{FF2B5EF4-FFF2-40B4-BE49-F238E27FC236}">
-                <a16:creationId xmlns:a16="http://schemas.microsoft.com/office/drawing/2014/main" id="{7269171A-BEBC-0C7D-9B53-043D2388D91B}"/>
+                <a16:creationId xmlns:a16="http://schemas.microsoft.com/office/drawing/2014/main" id="{7254BF28-12F1-CECA-4ADE-994C3FF13916}"/>
               </a:ext>
             </a:extLst>
           </p:cNvPr>
@@ -5612,7 +5606,7 @@
           <p:cNvPr id="5" name="テキスト ボックス 4">
             <a:extLst>
               <a:ext uri="{FF2B5EF4-FFF2-40B4-BE49-F238E27FC236}">
-                <a16:creationId xmlns:a16="http://schemas.microsoft.com/office/drawing/2014/main" id="{A4FA816C-21A0-0B67-B3C7-67771C63734B}"/>
+                <a16:creationId xmlns:a16="http://schemas.microsoft.com/office/drawing/2014/main" id="{2BE91997-E777-7BD6-E7B3-BB6A2FDA1D15}"/>
               </a:ext>
             </a:extLst>
           </p:cNvPr>
@@ -5659,7 +5653,7 @@
             <a:hlinkClick r:id="" action="ppaction://media"/>
             <a:extLst>
               <a:ext uri="{FF2B5EF4-FFF2-40B4-BE49-F238E27FC236}">
-                <a16:creationId xmlns:a16="http://schemas.microsoft.com/office/drawing/2014/main" id="{01C2979D-8E59-0BA0-63D4-07A3482FB1ED}"/>
+                <a16:creationId xmlns:a16="http://schemas.microsoft.com/office/drawing/2014/main" id="{24E11B10-12CE-2446-F7D1-8F533DD28FD7}"/>
               </a:ext>
             </a:extLst>
           </p:cNvPr>
@@ -5694,7 +5688,7 @@
     </p:spTree>
     <p:extLst>
       <p:ext uri="{BB962C8B-B14F-4D97-AF65-F5344CB8AC3E}">
-        <p14:creationId xmlns:p14="http://schemas.microsoft.com/office/powerpoint/2010/main" val="2875738629"/>
+        <p14:creationId xmlns:p14="http://schemas.microsoft.com/office/powerpoint/2010/main" val="1413758059"/>
       </p:ext>
     </p:extLst>
   </p:cSld>
